--- a/Seminario de Sistemas/Clases/Presentacion del Curso - Seminario de Sistemas.pptx
+++ b/Seminario de Sistemas/Clases/Presentacion del Curso - Seminario de Sistemas.pptx
@@ -3431,7 +3431,7 @@
                 </a:solidFill>
                 <a:latin typeface="Calibri"/>
               </a:rPr>
-              <a:t> (jueves virtual síncrona · parciales presencial · festivos autónomos)</a:t>
+              <a:t> (Clase 1 y parciales presencial · resto virtual síncrona)</a:t>
             </a:r>
           </a:p>
           <a:p>
@@ -7922,7 +7922,7 @@
                 </a:solidFill>
                 <a:latin typeface="Calibri"/>
               </a:rPr>
-              <a:t> → </a:t>
+              <a:t> → cierre. Modalidad: </a:t>
             </a:r>
             <a:r>
               <a:rPr sz="1600" b="1" i="0">
@@ -7931,7 +7931,7 @@
                 </a:solidFill>
                 <a:latin typeface="Calibri"/>
               </a:rPr>
-              <a:t>Quiz corto</a:t>
+              <a:t>Presencialidad asistida</a:t>
             </a:r>
             <a:r>
               <a:rPr sz="1600" b="0" i="0">
@@ -7940,7 +7940,7 @@
                 </a:solidFill>
                 <a:latin typeface="Calibri"/>
               </a:rPr>
-              <a:t> cuando aplique. Modalidad: </a:t>
+              <a:t>: Clase 1 y parciales </a:t>
             </a:r>
             <a:r>
               <a:rPr sz="1600" b="1" i="0">
@@ -7949,7 +7949,7 @@
                 </a:solidFill>
                 <a:latin typeface="Calibri"/>
               </a:rPr>
-              <a:t>Presencialidad asistida</a:t>
+              <a:t>presencial</a:t>
             </a:r>
             <a:r>
               <a:rPr sz="1600" b="0" i="0">
@@ -7958,7 +7958,43 @@
                 </a:solidFill>
                 <a:latin typeface="Calibri"/>
               </a:rPr>
-              <a:t> (parciales presencial · resto virtual síncrona · festivos autónomos).</a:t>
+              <a:t>; resto </a:t>
+            </a:r>
+            <a:r>
+              <a:rPr sz="1600" b="1" i="0">
+                <a:solidFill>
+                  <a:srgbClr val="333333"/>
+                </a:solidFill>
+                <a:latin typeface="Calibri"/>
+              </a:rPr>
+              <a:t>virtual síncrona</a:t>
+            </a:r>
+            <a:r>
+              <a:rPr sz="1600" b="0" i="0">
+                <a:solidFill>
+                  <a:srgbClr val="333333"/>
+                </a:solidFill>
+                <a:latin typeface="Calibri"/>
+              </a:rPr>
+              <a:t>; festivos = </a:t>
+            </a:r>
+            <a:r>
+              <a:rPr sz="1600" b="1" i="0">
+                <a:solidFill>
+                  <a:srgbClr val="333333"/>
+                </a:solidFill>
+                <a:latin typeface="Calibri"/>
+              </a:rPr>
+              <a:t>clase autónoma</a:t>
+            </a:r>
+            <a:r>
+              <a:rPr sz="1600" b="0" i="0">
+                <a:solidFill>
+                  <a:srgbClr val="333333"/>
+                </a:solidFill>
+                <a:latin typeface="Calibri"/>
+              </a:rPr>
+              <a:t>.</a:t>
             </a:r>
           </a:p>
           <a:p>

--- a/Seminario de Sistemas/Clases/Presentacion del Curso - Seminario de Sistemas.pptx
+++ b/Seminario de Sistemas/Clases/Presentacion del Curso - Seminario de Sistemas.pptx
@@ -8473,7 +8473,7 @@
                 </a:solidFill>
                 <a:latin typeface="Calibri"/>
               </a:rPr>
-              <a:t>–   Talleres / Quiz · 10%</a:t>
+              <a:t>–   Talleres o Quiz · 10%</a:t>
             </a:r>
           </a:p>
           <a:p>
@@ -8753,7 +8753,7 @@
                 </a:solidFill>
                 <a:latin typeface="Calibri"/>
               </a:rPr>
-              <a:t>–   Talleres / Quiz · 10%</a:t>
+              <a:t>–   Talleres o Quiz · 10%</a:t>
             </a:r>
           </a:p>
           <a:p>

--- a/Seminario de Sistemas/Clases/Presentacion del Curso - Seminario de Sistemas.pptx
+++ b/Seminario de Sistemas/Clases/Presentacion del Curso - Seminario de Sistemas.pptx
@@ -3347,7 +3347,7 @@
                 </a:solidFill>
                 <a:latin typeface="Calibri"/>
               </a:rPr>
-              <a:t>2026-1</a:t>
+              <a:t>2026-2</a:t>
             </a:r>
           </a:p>
           <a:p>
@@ -3532,7 +3532,7 @@
                 </a:solidFill>
                 <a:latin typeface="Calibri"/>
               </a:rPr>
-              <a:t>20:10</a:t>
+              <a:t>18:10</a:t>
             </a:r>
           </a:p>
         </p:txBody>
@@ -4055,6 +4055,40 @@
                 </a:solidFill>
                 <a:latin typeface="Calibri"/>
               </a:rPr>
+              <a:t>–   </a:t>
+            </a:r>
+            <a:r>
+              <a:rPr sz="1600" b="1" i="0">
+                <a:solidFill>
+                  <a:srgbClr val="333333"/>
+                </a:solidFill>
+                <a:latin typeface="Calibri"/>
+              </a:rPr>
+              <a:t>ExamLab</a:t>
+            </a:r>
+            <a:r>
+              <a:rPr sz="1600" b="0" i="0">
+                <a:solidFill>
+                  <a:srgbClr val="333333"/>
+                </a:solidFill>
+                <a:latin typeface="Calibri"/>
+              </a:rPr>
+              <a:t> (https://examlab.lovable.app/): entrega de talleres + quices/parciales del curso.</a:t>
+            </a:r>
+          </a:p>
+          <a:p>
+            <a:pPr>
+              <a:spcAft>
+                <a:spcPts val="800"/>
+              </a:spcAft>
+            </a:pPr>
+            <a:r>
+              <a:rPr sz="1600" b="0" i="0">
+                <a:solidFill>
+                  <a:srgbClr val="333333"/>
+                </a:solidFill>
+                <a:latin typeface="Calibri"/>
+              </a:rPr>
               <a:t>–   Material: carpeta compartida `Clases/` (Presentación del Curso y Clase N).</a:t>
             </a:r>
           </a:p>
@@ -4512,7 +4546,7 @@
                 </a:solidFill>
                 <a:latin typeface="Calibri"/>
               </a:rPr>
-              <a:t>Día 1: Sesión 0 (Presentación del curso, archivo aparte) + Clase 1 (diagnóstico + Conceptos iniciales). Material estudiante solo en carpeta Clases/.</a:t>
+              <a:t>Día 1: Sesión 0 (Presentación del curso, archivo aparte) + Clase 1 (diagnóstico + Conceptos iniciales). Material estudiante solo en carpeta Clases/. Talleres y quices/parciales en ExamLab (https://examlab.lovable.app/).</a:t>
             </a:r>
           </a:p>
         </p:txBody>
@@ -4879,7 +4913,7 @@
         <p:spPr>
           <a:xfrm>
             <a:off x="457200" y="1591056"/>
-            <a:ext cx="3624986" cy="2331720"/>
+            <a:ext cx="3624986" cy="2299716"/>
           </a:xfrm>
           <a:prstGeom prst="roundRect">
             <a:avLst>
@@ -5083,7 +5117,7 @@
         <p:spPr>
           <a:xfrm>
             <a:off x="4283354" y="1591056"/>
-            <a:ext cx="3624986" cy="2331720"/>
+            <a:ext cx="3624986" cy="2299716"/>
           </a:xfrm>
           <a:prstGeom prst="roundRect">
             <a:avLst>
@@ -5287,7 +5321,7 @@
         <p:spPr>
           <a:xfrm>
             <a:off x="8109508" y="1591056"/>
-            <a:ext cx="3624986" cy="2331720"/>
+            <a:ext cx="3624986" cy="2299716"/>
           </a:xfrm>
           <a:prstGeom prst="roundRect">
             <a:avLst>
@@ -5484,7 +5518,211 @@
       </p:sp>
       <p:sp>
         <p:nvSpPr>
-          <p:cNvPr id="21" name="TextBox 20"/>
+          <p:cNvPr id="21" name="Rounded Rectangle 20"/>
+          <p:cNvSpPr/>
+          <p:nvPr/>
+        </p:nvSpPr>
+        <p:spPr>
+          <a:xfrm>
+            <a:off x="457200" y="4055364"/>
+            <a:ext cx="3624986" cy="2299716"/>
+          </a:xfrm>
+          <a:prstGeom prst="roundRect">
+            <a:avLst>
+              <a:gd name="adj" fmla="val 12000"/>
+            </a:avLst>
+          </a:prstGeom>
+          <a:solidFill>
+            <a:srgbClr val="F2F2F2"/>
+          </a:solidFill>
+          <a:ln>
+            <a:noFill/>
+          </a:ln>
+        </p:spPr>
+        <p:style>
+          <a:lnRef idx="1">
+            <a:schemeClr val="accent1"/>
+          </a:lnRef>
+          <a:fillRef idx="3">
+            <a:schemeClr val="accent1"/>
+          </a:fillRef>
+          <a:effectRef idx="2">
+            <a:schemeClr val="accent1"/>
+          </a:effectRef>
+          <a:fontRef idx="minor">
+            <a:schemeClr val="lt1"/>
+          </a:fontRef>
+        </p:style>
+        <p:txBody>
+          <a:bodyPr rtlCol="0" anchor="ctr"/>
+          <a:lstStyle/>
+          <a:p>
+            <a:pPr algn="ctr"/>
+          </a:p>
+        </p:txBody>
+      </p:sp>
+      <p:sp>
+        <p:nvSpPr>
+          <p:cNvPr id="22" name="Rectangle 21"/>
+          <p:cNvSpPr/>
+          <p:nvPr/>
+        </p:nvSpPr>
+        <p:spPr>
+          <a:xfrm>
+            <a:off x="457200" y="4055364"/>
+            <a:ext cx="3624986" cy="64008"/>
+          </a:xfrm>
+          <a:prstGeom prst="rect">
+            <a:avLst/>
+          </a:prstGeom>
+          <a:solidFill>
+            <a:srgbClr val="095292"/>
+          </a:solidFill>
+          <a:ln>
+            <a:noFill/>
+          </a:ln>
+        </p:spPr>
+        <p:style>
+          <a:lnRef idx="1">
+            <a:schemeClr val="accent1"/>
+          </a:lnRef>
+          <a:fillRef idx="3">
+            <a:schemeClr val="accent1"/>
+          </a:fillRef>
+          <a:effectRef idx="2">
+            <a:schemeClr val="accent1"/>
+          </a:effectRef>
+          <a:fontRef idx="minor">
+            <a:schemeClr val="lt1"/>
+          </a:fontRef>
+        </p:style>
+        <p:txBody>
+          <a:bodyPr rtlCol="0" anchor="ctr"/>
+          <a:lstStyle/>
+          <a:p>
+            <a:pPr algn="ctr"/>
+          </a:p>
+        </p:txBody>
+      </p:sp>
+      <p:sp>
+        <p:nvSpPr>
+          <p:cNvPr id="23" name="Rectangle 22"/>
+          <p:cNvSpPr/>
+          <p:nvPr/>
+        </p:nvSpPr>
+        <p:spPr>
+          <a:xfrm>
+            <a:off x="457200" y="4119372"/>
+            <a:ext cx="3624986" cy="27432"/>
+          </a:xfrm>
+          <a:prstGeom prst="rect">
+            <a:avLst/>
+          </a:prstGeom>
+          <a:solidFill>
+            <a:srgbClr val="FFD000"/>
+          </a:solidFill>
+          <a:ln>
+            <a:noFill/>
+          </a:ln>
+        </p:spPr>
+        <p:style>
+          <a:lnRef idx="1">
+            <a:schemeClr val="accent1"/>
+          </a:lnRef>
+          <a:fillRef idx="3">
+            <a:schemeClr val="accent1"/>
+          </a:fillRef>
+          <a:effectRef idx="2">
+            <a:schemeClr val="accent1"/>
+          </a:effectRef>
+          <a:fontRef idx="minor">
+            <a:schemeClr val="lt1"/>
+          </a:fontRef>
+        </p:style>
+        <p:txBody>
+          <a:bodyPr rtlCol="0" anchor="ctr"/>
+          <a:lstStyle/>
+          <a:p>
+            <a:pPr algn="ctr"/>
+          </a:p>
+        </p:txBody>
+      </p:sp>
+      <p:pic>
+        <p:nvPicPr>
+          <p:cNvPr id="24" name="Picture 23" descr="examlab.png"/>
+          <p:cNvPicPr>
+            <a:picLocks noChangeAspect="1"/>
+          </p:cNvPicPr>
+          <p:nvPr/>
+        </p:nvPicPr>
+        <p:blipFill>
+          <a:blip r:embed="rId5"/>
+          <a:stretch>
+            <a:fillRect/>
+          </a:stretch>
+        </p:blipFill>
+        <p:spPr>
+          <a:xfrm>
+            <a:off x="1743913" y="4256532"/>
+            <a:ext cx="1051560" cy="1051560"/>
+          </a:xfrm>
+          <a:prstGeom prst="rect">
+            <a:avLst/>
+          </a:prstGeom>
+        </p:spPr>
+      </p:pic>
+      <p:sp>
+        <p:nvSpPr>
+          <p:cNvPr id="25" name="TextBox 24"/>
+          <p:cNvSpPr txBox="1"/>
+          <p:nvPr/>
+        </p:nvSpPr>
+        <p:spPr>
+          <a:xfrm>
+            <a:off x="530352" y="5381244"/>
+            <a:ext cx="3478682" cy="502920"/>
+          </a:xfrm>
+          <a:prstGeom prst="rect">
+            <a:avLst/>
+          </a:prstGeom>
+          <a:noFill/>
+        </p:spPr>
+        <p:txBody>
+          <a:bodyPr wrap="square" anchor="t"/>
+          <a:lstStyle/>
+          <a:p>
+            <a:pPr algn="ctr"/>
+            <a:r>
+              <a:rPr sz="1300" b="1" i="0">
+                <a:solidFill>
+                  <a:srgbClr val="095292"/>
+                </a:solidFill>
+                <a:latin typeface="Calibri"/>
+              </a:rPr>
+              <a:t>ExamLab</a:t>
+            </a:r>
+          </a:p>
+          <a:p>
+            <a:pPr algn="ctr">
+              <a:spcBef>
+                <a:spcPts val="200"/>
+              </a:spcBef>
+            </a:pPr>
+            <a:r>
+              <a:rPr sz="1000" b="0" i="0">
+                <a:solidFill>
+                  <a:srgbClr val="666666"/>
+                </a:solidFill>
+                <a:latin typeface="Calibri"/>
+              </a:rPr>
+              <a:t>Talleres + quices/parciales</a:t>
+            </a:r>
+          </a:p>
+        </p:txBody>
+      </p:sp>
+      <p:sp>
+        <p:nvSpPr>
+          <p:cNvPr id="26" name="TextBox 25"/>
           <p:cNvSpPr txBox="1"/>
           <p:nvPr/>
         </p:nvSpPr>
@@ -5695,7 +5933,7 @@
                 </a:solidFill>
                 <a:latin typeface="Calibri"/>
               </a:rPr>
-              <a:t> · 2026-1</a:t>
+              <a:t> · 2026-2</a:t>
             </a:r>
           </a:p>
           <a:p>

--- a/Seminario de Sistemas/Clases/Presentacion del Curso - Seminario de Sistemas.pptx
+++ b/Seminario de Sistemas/Clases/Presentacion del Curso - Seminario de Sistemas.pptx
@@ -4684,7 +4684,7 @@
                 </a:solidFill>
                 <a:latin typeface="Calibri"/>
               </a:rPr>
-              <a:t>Parciales NUNCA en autónoma: P1=Clase 5 (10/09), P2=Clase 10 (15/10), P3=Clase 15 (19/11).</a:t>
+              <a:t>Parciales NUNCA en autónoma: P1=sesión 5 (24/09), P2=sesión 9 (22/10), P3=sesión 13 (19/11, con sustentación final).</a:t>
             </a:r>
           </a:p>
         </p:txBody>
@@ -8099,7 +8099,7 @@
                 </a:solidFill>
                 <a:latin typeface="Calibri"/>
               </a:rPr>
-              <a:t>Clase 1</a:t>
+              <a:t>Sesión 1</a:t>
             </a:r>
             <a:r>
               <a:rPr sz="1600" b="0" i="0">
@@ -8108,7 +8108,7 @@
                 </a:solidFill>
                 <a:latin typeface="Calibri"/>
               </a:rPr>
-              <a:t> (material en archivo aparte) = diagnóstico de conocimientos previos + arranque temático — mismo bloque de hoy.</a:t>
+              <a:t> (material «Clase 1», archivo aparte) = diagnóstico de conocimientos previos + arranque temático — mismo bloque de hoy.</a:t>
             </a:r>
           </a:p>
           <a:p>
@@ -8160,7 +8160,7 @@
                 </a:solidFill>
                 <a:latin typeface="Calibri"/>
               </a:rPr>
-              <a:t> → cierre. Modalidad: </a:t>
+              <a:t> → cierre. </a:t>
             </a:r>
             <a:r>
               <a:rPr sz="1600" b="1" i="0">
@@ -8169,7 +8169,7 @@
                 </a:solidFill>
                 <a:latin typeface="Calibri"/>
               </a:rPr>
-              <a:t>Presencialidad asistida</a:t>
+              <a:t>13 sesiones</a:t>
             </a:r>
             <a:r>
               <a:rPr sz="1600" b="0" i="0">
@@ -8178,7 +8178,7 @@
                 </a:solidFill>
                 <a:latin typeface="Calibri"/>
               </a:rPr>
-              <a:t>: Clase 1 y parciales </a:t>
+              <a:t>: sesión 1 y parciales (</a:t>
             </a:r>
             <a:r>
               <a:rPr sz="1600" b="1" i="0">
@@ -8187,6 +8187,24 @@
                 </a:solidFill>
                 <a:latin typeface="Calibri"/>
               </a:rPr>
+              <a:t>5 / 9 / 13</a:t>
+            </a:r>
+            <a:r>
+              <a:rPr sz="1600" b="0" i="0">
+                <a:solidFill>
+                  <a:srgbClr val="333333"/>
+                </a:solidFill>
+                <a:latin typeface="Calibri"/>
+              </a:rPr>
+              <a:t>) </a:t>
+            </a:r>
+            <a:r>
+              <a:rPr sz="1600" b="1" i="0">
+                <a:solidFill>
+                  <a:srgbClr val="333333"/>
+                </a:solidFill>
+                <a:latin typeface="Calibri"/>
+              </a:rPr>
               <a:t>presencial</a:t>
             </a:r>
             <a:r>
@@ -8214,7 +8232,7 @@
                 </a:solidFill>
                 <a:latin typeface="Calibri"/>
               </a:rPr>
-              <a:t>; festivos = </a:t>
+              <a:t>; dos sesiones son </a:t>
             </a:r>
             <a:r>
               <a:rPr sz="1600" b="1" i="0">
@@ -8223,7 +8241,7 @@
                 </a:solidFill>
                 <a:latin typeface="Calibri"/>
               </a:rPr>
-              <a:t>clase autónoma</a:t>
+              <a:t>dobles</a:t>
             </a:r>
             <a:r>
               <a:rPr sz="1600" b="0" i="0">
@@ -8232,7 +8250,7 @@
                 </a:solidFill>
                 <a:latin typeface="Calibri"/>
               </a:rPr>
-              <a:t>.</a:t>
+              <a:t> (dos temas en un bloque).</a:t>
             </a:r>
           </a:p>
           <a:p>
@@ -8638,7 +8656,7 @@
                 </a:solidFill>
                 <a:latin typeface="Calibri"/>
               </a:rPr>
-              <a:t>13/08 – 13/09/2026</a:t>
+              <a:t>24/08 – 27/09/2026</a:t>
             </a:r>
           </a:p>
         </p:txBody>
@@ -8695,7 +8713,7 @@
                 </a:solidFill>
                 <a:latin typeface="Calibri"/>
               </a:rPr>
-              <a:t> (10/09 · Clase 5) · 10%</a:t>
+              <a:t> (24/09 · sesión 5) · 10%</a:t>
             </a:r>
           </a:p>
           <a:p>
@@ -8918,7 +8936,7 @@
                 </a:solidFill>
                 <a:latin typeface="Calibri"/>
               </a:rPr>
-              <a:t>14/09 – 18/10/2026</a:t>
+              <a:t>28/09 – 25/10/2026</a:t>
             </a:r>
           </a:p>
         </p:txBody>
@@ -8975,7 +8993,7 @@
                 </a:solidFill>
                 <a:latin typeface="Calibri"/>
               </a:rPr>
-              <a:t> (15/10 · Clase 10) · 10%</a:t>
+              <a:t> (22/10 · sesión 9) · 10%</a:t>
             </a:r>
           </a:p>
           <a:p>
@@ -9198,7 +9216,7 @@
                 </a:solidFill>
                 <a:latin typeface="Calibri"/>
               </a:rPr>
-              <a:t>19/10 – 22/11/2026</a:t>
+              <a:t>26/10 – 22/11/2026</a:t>
             </a:r>
           </a:p>
         </p:txBody>
@@ -9255,7 +9273,7 @@
                 </a:solidFill>
                 <a:latin typeface="Calibri"/>
               </a:rPr>
-              <a:t> (19/11 · Clase 15) · 15%</a:t>
+              <a:t> (19/11 · sesión 13) · 15%</a:t>
             </a:r>
           </a:p>
           <a:p>
@@ -9553,7 +9571,25 @@
                 </a:solidFill>
                 <a:latin typeface="Calibri"/>
               </a:rPr>
-              <a:t>Día 1: Sesión 0 (Presentación del curso, archivo aparte) + Clase 1 (diagnóstico · tema)</a:t>
+              <a:t>13 sesiones · los 15 temas se conservan: dos sesiones son </a:t>
+            </a:r>
+            <a:r>
+              <a:rPr sz="1300" b="1" i="0">
+                <a:solidFill>
+                  <a:srgbClr val="666666"/>
+                </a:solidFill>
+                <a:latin typeface="Calibri"/>
+              </a:rPr>
+              <a:t>dobles</a:t>
+            </a:r>
+            <a:r>
+              <a:rPr sz="1300" b="0" i="0">
+                <a:solidFill>
+                  <a:srgbClr val="666666"/>
+                </a:solidFill>
+                <a:latin typeface="Calibri"/>
+              </a:rPr>
+              <a:t> (dos temas en un bloque). Día 1: Sesión 0 (archivo aparte) + Sesión 1 (diagnóstico · tema)</a:t>
             </a:r>
           </a:p>
         </p:txBody>
@@ -9610,7 +9646,7 @@
                 </a:solidFill>
                 <a:latin typeface="Calibri"/>
               </a:rPr>
-              <a:t> Presentación del curso (logística) (13/08)</a:t>
+              <a:t> Presentación del curso (logística) + socialización del PI (27/08)</a:t>
             </a:r>
           </a:p>
           <a:p>
@@ -9635,7 +9671,7 @@
                 </a:solidFill>
                 <a:latin typeface="Calibri"/>
               </a:rPr>
-              <a:t>Clase 1 –</a:t>
+              <a:t>Sesión 1 –</a:t>
             </a:r>
             <a:r>
               <a:rPr sz="1600" b="0" i="0">
@@ -9644,7 +9680,7 @@
                 </a:solidFill>
                 <a:latin typeface="Calibri"/>
               </a:rPr>
-              <a:t> Diagnóstico · Conceptos iniciales (13/08)</a:t>
+              <a:t> Diagnóstico · Conceptos iniciales (27/08)</a:t>
             </a:r>
           </a:p>
           <a:p>
@@ -9669,7 +9705,7 @@
                 </a:solidFill>
                 <a:latin typeface="Calibri"/>
               </a:rPr>
-              <a:t>Clase 2 –</a:t>
+              <a:t>Sesión 2 –</a:t>
             </a:r>
             <a:r>
               <a:rPr sz="1600" b="0" i="0">
@@ -9678,7 +9714,7 @@
                 </a:solidFill>
                 <a:latin typeface="Calibri"/>
               </a:rPr>
-              <a:t> Ciclos de vida (20/08)</a:t>
+              <a:t> Ciclos de vida del software (03/09)</a:t>
             </a:r>
           </a:p>
           <a:p>
@@ -9703,7 +9739,7 @@
                 </a:solidFill>
                 <a:latin typeface="Calibri"/>
               </a:rPr>
-              <a:t>Clase 3 –</a:t>
+              <a:t>Sesión 3 –</a:t>
             </a:r>
             <a:r>
               <a:rPr sz="1600" b="0" i="0">
@@ -9712,7 +9748,7 @@
                 </a:solidFill>
                 <a:latin typeface="Calibri"/>
               </a:rPr>
-              <a:t> Metodologías tradicionales (27/08)</a:t>
+              <a:t> Metodologías tradicionales (10/09)</a:t>
             </a:r>
           </a:p>
           <a:p>
@@ -9737,7 +9773,7 @@
                 </a:solidFill>
                 <a:latin typeface="Calibri"/>
               </a:rPr>
-              <a:t>Clase 4 –</a:t>
+              <a:t>Sesión 4 –</a:t>
             </a:r>
             <a:r>
               <a:rPr sz="1600" b="0" i="0">
@@ -9746,7 +9782,7 @@
                 </a:solidFill>
                 <a:latin typeface="Calibri"/>
               </a:rPr>
-              <a:t> Metodologías ágiles (03/09)</a:t>
+              <a:t> Metodologías ágiles (17/09)</a:t>
             </a:r>
           </a:p>
           <a:p>
@@ -9771,7 +9807,7 @@
                 </a:solidFill>
                 <a:latin typeface="Calibri"/>
               </a:rPr>
-              <a:t>Clase 5 –</a:t>
+              <a:t>Sesión 5 –</a:t>
             </a:r>
             <a:r>
               <a:rPr sz="1600" b="0" i="0">
@@ -9780,7 +9816,7 @@
                 </a:solidFill>
                 <a:latin typeface="Calibri"/>
               </a:rPr>
-              <a:t> Parcial 1 (10/09)</a:t>
+              <a:t> Parcial 1 (24/09) · presencial · solo evaluación</a:t>
             </a:r>
           </a:p>
           <a:p>
@@ -9805,7 +9841,7 @@
                 </a:solidFill>
                 <a:latin typeface="Calibri"/>
               </a:rPr>
-              <a:t>Clase 6 –</a:t>
+              <a:t>Sesión 6 –</a:t>
             </a:r>
             <a:r>
               <a:rPr sz="1600" b="0" i="0">
@@ -9814,9 +9850,32 @@
                 </a:solidFill>
                 <a:latin typeface="Calibri"/>
               </a:rPr>
-              <a:t> Requerimientos de software (17/09)</a:t>
-            </a:r>
-          </a:p>
+              <a:t> Requerimientos de software (01/10)</a:t>
+            </a:r>
+          </a:p>
+        </p:txBody>
+      </p:sp>
+      <p:sp>
+        <p:nvSpPr>
+          <p:cNvPr id="7" name="TextBox 6"/>
+          <p:cNvSpPr txBox="1"/>
+          <p:nvPr/>
+        </p:nvSpPr>
+        <p:spPr>
+          <a:xfrm>
+            <a:off x="6187287" y="1453895"/>
+            <a:ext cx="5364327" cy="4946904"/>
+          </a:xfrm>
+          <a:prstGeom prst="rect">
+            <a:avLst/>
+          </a:prstGeom>
+          <a:noFill/>
+        </p:spPr>
+        <p:txBody>
+          <a:bodyPr wrap="square">
+            <a:spAutoFit/>
+          </a:bodyPr>
+          <a:lstStyle/>
           <a:p>
             <a:pPr>
               <a:spcAft>
@@ -9839,7 +9898,7 @@
                 </a:solidFill>
                 <a:latin typeface="Calibri"/>
               </a:rPr>
-              <a:t>Clase 7 –</a:t>
+              <a:t>Sesión 7 –</a:t>
             </a:r>
             <a:r>
               <a:rPr sz="1600" b="0" i="0">
@@ -9848,32 +9907,9 @@
                 </a:solidFill>
                 <a:latin typeface="Calibri"/>
               </a:rPr>
-              <a:t> Historias de usuario (24/09)</a:t>
-            </a:r>
-          </a:p>
-        </p:txBody>
-      </p:sp>
-      <p:sp>
-        <p:nvSpPr>
-          <p:cNvPr id="7" name="TextBox 6"/>
-          <p:cNvSpPr txBox="1"/>
-          <p:nvPr/>
-        </p:nvSpPr>
-        <p:spPr>
-          <a:xfrm>
-            <a:off x="6187287" y="1453895"/>
-            <a:ext cx="5364327" cy="4946904"/>
-          </a:xfrm>
-          <a:prstGeom prst="rect">
-            <a:avLst/>
-          </a:prstGeom>
-          <a:noFill/>
-        </p:spPr>
-        <p:txBody>
-          <a:bodyPr wrap="square">
-            <a:spAutoFit/>
-          </a:bodyPr>
-          <a:lstStyle/>
+              <a:t> Historias de usuario (08/10)</a:t>
+            </a:r>
+          </a:p>
           <a:p>
             <a:pPr>
               <a:spcAft>
@@ -9896,7 +9932,7 @@
                 </a:solidFill>
                 <a:latin typeface="Calibri"/>
               </a:rPr>
-              <a:t>Clase 8 –</a:t>
+              <a:t>Sesión 8 –</a:t>
             </a:r>
             <a:r>
               <a:rPr sz="1600" b="0" i="0">
@@ -9905,7 +9941,7 @@
                 </a:solidFill>
                 <a:latin typeface="Calibri"/>
               </a:rPr>
-              <a:t> Introducción a UML (01/10)</a:t>
+              <a:t> Introducción a UML + Casos de uso (15/10) · sesión doble · Clases 8+9</a:t>
             </a:r>
           </a:p>
           <a:p>
@@ -9930,7 +9966,7 @@
                 </a:solidFill>
                 <a:latin typeface="Calibri"/>
               </a:rPr>
-              <a:t>Clase 9 –</a:t>
+              <a:t>Sesión 9 –</a:t>
             </a:r>
             <a:r>
               <a:rPr sz="1600" b="0" i="0">
@@ -9939,7 +9975,7 @@
                 </a:solidFill>
                 <a:latin typeface="Calibri"/>
               </a:rPr>
-              <a:t> Casos de uso (08/10)</a:t>
+              <a:t> Parcial 2 (22/10) · presencial · solo evaluación</a:t>
             </a:r>
           </a:p>
           <a:p>
@@ -9964,7 +10000,7 @@
                 </a:solidFill>
                 <a:latin typeface="Calibri"/>
               </a:rPr>
-              <a:t>Clase 10 –</a:t>
+              <a:t>Sesión 10 –</a:t>
             </a:r>
             <a:r>
               <a:rPr sz="1600" b="0" i="0">
@@ -9973,7 +10009,7 @@
                 </a:solidFill>
                 <a:latin typeface="Calibri"/>
               </a:rPr>
-              <a:t> Parcial 2 (15/10)</a:t>
+              <a:t> Avance del proyecto integrador + Diagramas UML avanzados (29/10) · sesión doble · Clases 11+12</a:t>
             </a:r>
           </a:p>
           <a:p>
@@ -9998,7 +10034,7 @@
                 </a:solidFill>
                 <a:latin typeface="Calibri"/>
               </a:rPr>
-              <a:t>Clase 11 –</a:t>
+              <a:t>Sesión 11 –</a:t>
             </a:r>
             <a:r>
               <a:rPr sz="1600" b="0" i="0">
@@ -10007,7 +10043,7 @@
                 </a:solidFill>
                 <a:latin typeface="Calibri"/>
               </a:rPr>
-              <a:t> Avance proyecto integrador (22/10)</a:t>
+              <a:t> Diseño de interfaces (05/11) · material Clase 13</a:t>
             </a:r>
           </a:p>
           <a:p>
@@ -10032,7 +10068,7 @@
                 </a:solidFill>
                 <a:latin typeface="Calibri"/>
               </a:rPr>
-              <a:t>Clase 12 –</a:t>
+              <a:t>Sesión 12 –</a:t>
             </a:r>
             <a:r>
               <a:rPr sz="1600" b="0" i="0">
@@ -10041,7 +10077,7 @@
                 </a:solidFill>
                 <a:latin typeface="Calibri"/>
               </a:rPr>
-              <a:t> Diagramas UML avanzados (29/10)</a:t>
+              <a:t> Preparación de la sustentación y cierre (12/11) · material Clase 14</a:t>
             </a:r>
           </a:p>
           <a:p>
@@ -10066,7 +10102,7 @@
                 </a:solidFill>
                 <a:latin typeface="Calibri"/>
               </a:rPr>
-              <a:t>Clase 13 –</a:t>
+              <a:t>Sesión 13 –</a:t>
             </a:r>
             <a:r>
               <a:rPr sz="1600" b="0" i="0">
@@ -10075,75 +10111,7 @@
                 </a:solidFill>
                 <a:latin typeface="Calibri"/>
               </a:rPr>
-              <a:t> Diseño de interfaces (05/11)</a:t>
-            </a:r>
-          </a:p>
-          <a:p>
-            <a:pPr>
-              <a:spcAft>
-                <a:spcPts val="900"/>
-              </a:spcAft>
-            </a:pPr>
-            <a:r>
-              <a:rPr sz="1600" b="0" i="0">
-                <a:solidFill>
-                  <a:srgbClr val="333333"/>
-                </a:solidFill>
-                <a:latin typeface="Calibri"/>
-              </a:rPr>
-              <a:t>–   </a:t>
-            </a:r>
-            <a:r>
-              <a:rPr sz="1600" b="1" i="0">
-                <a:solidFill>
-                  <a:srgbClr val="333333"/>
-                </a:solidFill>
-                <a:latin typeface="Calibri"/>
-              </a:rPr>
-              <a:t>Clase 14 –</a:t>
-            </a:r>
-            <a:r>
-              <a:rPr sz="1600" b="0" i="0">
-                <a:solidFill>
-                  <a:srgbClr val="333333"/>
-                </a:solidFill>
-                <a:latin typeface="Calibri"/>
-              </a:rPr>
-              <a:t> Evaluación final (prep. sustentación) · Sustentación de proyectos + cierre (12/11)</a:t>
-            </a:r>
-          </a:p>
-          <a:p>
-            <a:pPr>
-              <a:spcAft>
-                <a:spcPts val="900"/>
-              </a:spcAft>
-            </a:pPr>
-            <a:r>
-              <a:rPr sz="1600" b="0" i="0">
-                <a:solidFill>
-                  <a:srgbClr val="333333"/>
-                </a:solidFill>
-                <a:latin typeface="Calibri"/>
-              </a:rPr>
-              <a:t>–   </a:t>
-            </a:r>
-            <a:r>
-              <a:rPr sz="1600" b="1" i="0">
-                <a:solidFill>
-                  <a:srgbClr val="333333"/>
-                </a:solidFill>
-                <a:latin typeface="Calibri"/>
-              </a:rPr>
-              <a:t>Clase 15 –</a:t>
-            </a:r>
-            <a:r>
-              <a:rPr sz="1600" b="0" i="0">
-                <a:solidFill>
-                  <a:srgbClr val="333333"/>
-                </a:solidFill>
-                <a:latin typeface="Calibri"/>
-              </a:rPr>
-              <a:t> Parcial 3 (19/11)</a:t>
+              <a:t> Parcial 3 + sustentación de proyectos y cierre (19/11) · presencial</a:t>
             </a:r>
           </a:p>
         </p:txBody>

--- a/Seminario de Sistemas/Clases/Presentacion del Curso - Seminario de Sistemas.pptx
+++ b/Seminario de Sistemas/Clases/Presentacion del Curso - Seminario de Sistemas.pptx
@@ -3422,7 +3422,7 @@
                 </a:solidFill>
                 <a:latin typeface="Calibri"/>
               </a:rPr>
-              <a:t>Presencialidad asistida</a:t>
+              <a:t>Virtual</a:t>
             </a:r>
             <a:r>
               <a:rPr sz="1500" b="0" i="0">
@@ -3431,7 +3431,7 @@
                 </a:solidFill>
                 <a:latin typeface="Calibri"/>
               </a:rPr>
-              <a:t> (Clase 1 y parciales presencial · resto virtual síncrona)</a:t>
+              <a:t> (todas las sesiones virtual síncrona por Meet · festivos autónoma)</a:t>
             </a:r>
           </a:p>
           <a:p>
@@ -4408,7 +4408,7 @@
                 </a:solidFill>
                 <a:latin typeface="Calibri"/>
               </a:rPr>
-              <a:t>Jueves 18:00-20:00 (120 min). Modalidad: Presencialidad asistida (jueves virtual / parciales presencial). Grupo: 341C.</a:t>
+              <a:t>Jueves 18:00-20:00 (120 min). Modalidad: Virtual (todas las sesiones por Meet, incluidos los parciales). Grupo: 341C.</a:t>
             </a:r>
           </a:p>
         </p:txBody>
@@ -10111,7 +10111,7 @@
                 </a:solidFill>
                 <a:latin typeface="Calibri"/>
               </a:rPr>
-              <a:t> Parcial 3 + sustentación de proyectos y cierre (19/11) · presencial</a:t>
+              <a:t> Parcial 3 (19/11) · presencial · solo evaluación</a:t>
             </a:r>
           </a:p>
         </p:txBody>

--- a/Seminario de Sistemas/Clases/Presentacion del Curso - Seminario de Sistemas.pptx
+++ b/Seminario de Sistemas/Clases/Presentacion del Curso - Seminario de Sistemas.pptx
@@ -4073,7 +4073,7 @@
                 </a:solidFill>
                 <a:latin typeface="Calibri"/>
               </a:rPr>
-              <a:t> (https://examlab.lovable.app/): entrega de talleres + quices/parciales del curso.</a:t>
+              <a:t> (https://uniaj.examlab.workers.dev/): entrega de talleres + quices/parciales del curso.</a:t>
             </a:r>
           </a:p>
           <a:p>
@@ -4546,7 +4546,7 @@
                 </a:solidFill>
                 <a:latin typeface="Calibri"/>
               </a:rPr>
-              <a:t>Día 1: Sesión 0 (Presentación del curso, archivo aparte) + Clase 1 (diagnóstico + Conceptos iniciales). Material estudiante solo en carpeta Clases/. Talleres y quices/parciales en ExamLab (https://examlab.lovable.app/).</a:t>
+              <a:t>Día 1: Sesión 0 (Presentación del curso, archivo aparte) + Clase 1 (diagnóstico + Conceptos iniciales). Material estudiante solo en carpeta Clases/. Talleres y quices/parciales en ExamLab (https://uniaj.examlab.workers.dev/).</a:t>
             </a:r>
           </a:p>
         </p:txBody>

--- a/Seminario de Sistemas/Clases/Presentacion del Curso - Seminario de Sistemas.pptx
+++ b/Seminario de Sistemas/Clases/Presentacion del Curso - Seminario de Sistemas.pptx
@@ -4089,7 +4089,7 @@
                 </a:solidFill>
                 <a:latin typeface="Calibri"/>
               </a:rPr>
-              <a:t>–   Material: carpeta compartida `Clases/` (Presentación del Curso y Clase N).</a:t>
+              <a:t>–   Material: carpeta compartida «Clases/» (Presentación del Curso y Clase N).</a:t>
             </a:r>
           </a:p>
         </p:txBody>
@@ -5051,8 +5051,8 @@
         </p:blipFill>
         <p:spPr>
           <a:xfrm>
-            <a:off x="1743913" y="1792224"/>
-            <a:ext cx="1051560" cy="1051560"/>
+            <a:off x="1659331" y="1847087"/>
+            <a:ext cx="1220724" cy="1220724"/>
           </a:xfrm>
           <a:prstGeom prst="rect">
             <a:avLst/>
@@ -5067,8 +5067,8 @@
         </p:nvSpPr>
         <p:spPr>
           <a:xfrm>
-            <a:off x="530352" y="2916936"/>
-            <a:ext cx="3478682" cy="502920"/>
+            <a:off x="530352" y="3159251"/>
+            <a:ext cx="3478682" cy="621792"/>
           </a:xfrm>
           <a:prstGeom prst="rect">
             <a:avLst/>
@@ -5255,8 +5255,8 @@
         </p:blipFill>
         <p:spPr>
           <a:xfrm>
-            <a:off x="5570067" y="1792224"/>
-            <a:ext cx="1051560" cy="1051560"/>
+            <a:off x="5485485" y="1847087"/>
+            <a:ext cx="1220724" cy="1220724"/>
           </a:xfrm>
           <a:prstGeom prst="rect">
             <a:avLst/>
@@ -5271,8 +5271,8 @@
         </p:nvSpPr>
         <p:spPr>
           <a:xfrm>
-            <a:off x="4356506" y="2916936"/>
-            <a:ext cx="3478682" cy="502920"/>
+            <a:off x="4356506" y="3159251"/>
+            <a:ext cx="3478682" cy="621792"/>
           </a:xfrm>
           <a:prstGeom prst="rect">
             <a:avLst/>
@@ -5459,8 +5459,8 @@
         </p:blipFill>
         <p:spPr>
           <a:xfrm>
-            <a:off x="9396222" y="1792224"/>
-            <a:ext cx="1051560" cy="1051560"/>
+            <a:off x="9311640" y="1847087"/>
+            <a:ext cx="1220724" cy="1220724"/>
           </a:xfrm>
           <a:prstGeom prst="rect">
             <a:avLst/>
@@ -5475,8 +5475,8 @@
         </p:nvSpPr>
         <p:spPr>
           <a:xfrm>
-            <a:off x="8182660" y="2916936"/>
-            <a:ext cx="3478682" cy="502920"/>
+            <a:off x="8182660" y="3159251"/>
+            <a:ext cx="3478682" cy="621792"/>
           </a:xfrm>
           <a:prstGeom prst="rect">
             <a:avLst/>
@@ -5524,7 +5524,7 @@
         </p:nvSpPr>
         <p:spPr>
           <a:xfrm>
-            <a:off x="457200" y="4055364"/>
+            <a:off x="4283354" y="4055364"/>
             <a:ext cx="3624986" cy="2299716"/>
           </a:xfrm>
           <a:prstGeom prst="roundRect">
@@ -5569,7 +5569,7 @@
         </p:nvSpPr>
         <p:spPr>
           <a:xfrm>
-            <a:off x="457200" y="4055364"/>
+            <a:off x="4283354" y="4055364"/>
             <a:ext cx="3624986" cy="64008"/>
           </a:xfrm>
           <a:prstGeom prst="rect">
@@ -5612,7 +5612,7 @@
         </p:nvSpPr>
         <p:spPr>
           <a:xfrm>
-            <a:off x="457200" y="4119372"/>
+            <a:off x="4283354" y="4119372"/>
             <a:ext cx="3624986" cy="27432"/>
           </a:xfrm>
           <a:prstGeom prst="rect">
@@ -5663,8 +5663,8 @@
         </p:blipFill>
         <p:spPr>
           <a:xfrm>
-            <a:off x="1743913" y="4256532"/>
-            <a:ext cx="1051560" cy="1051560"/>
+            <a:off x="5485485" y="4311396"/>
+            <a:ext cx="1220724" cy="1220724"/>
           </a:xfrm>
           <a:prstGeom prst="rect">
             <a:avLst/>
@@ -5679,8 +5679,8 @@
         </p:nvSpPr>
         <p:spPr>
           <a:xfrm>
-            <a:off x="530352" y="5381244"/>
-            <a:ext cx="3478682" cy="502920"/>
+            <a:off x="4356506" y="5623560"/>
+            <a:ext cx="3478682" cy="621792"/>
           </a:xfrm>
           <a:prstGeom prst="rect">
             <a:avLst/>
@@ -8160,7 +8160,7 @@
                 </a:solidFill>
                 <a:latin typeface="Calibri"/>
               </a:rPr>
-              <a:t> → cierre. </a:t>
+              <a:t> → cierre. Modalidad </a:t>
             </a:r>
             <a:r>
               <a:rPr sz="1600" b="1" i="0">
@@ -8169,6 +8169,24 @@
                 </a:solidFill>
                 <a:latin typeface="Calibri"/>
               </a:rPr>
+              <a:t>Virtual</a:t>
+            </a:r>
+            <a:r>
+              <a:rPr sz="1600" b="0" i="0">
+                <a:solidFill>
+                  <a:srgbClr val="333333"/>
+                </a:solidFill>
+                <a:latin typeface="Calibri"/>
+              </a:rPr>
+              <a:t>: las </a:t>
+            </a:r>
+            <a:r>
+              <a:rPr sz="1600" b="1" i="0">
+                <a:solidFill>
+                  <a:srgbClr val="333333"/>
+                </a:solidFill>
+                <a:latin typeface="Calibri"/>
+              </a:rPr>
               <a:t>13 sesiones</a:t>
             </a:r>
             <a:r>
@@ -8178,7 +8196,7 @@
                 </a:solidFill>
                 <a:latin typeface="Calibri"/>
               </a:rPr>
-              <a:t>: sesión 1 y parciales (</a:t>
+              <a:t> son </a:t>
             </a:r>
             <a:r>
               <a:rPr sz="1600" b="1" i="0">
@@ -8187,6 +8205,24 @@
                 </a:solidFill>
                 <a:latin typeface="Calibri"/>
               </a:rPr>
+              <a:t>virtual síncrona</a:t>
+            </a:r>
+            <a:r>
+              <a:rPr sz="1600" b="0" i="0">
+                <a:solidFill>
+                  <a:srgbClr val="333333"/>
+                </a:solidFill>
+                <a:latin typeface="Calibri"/>
+              </a:rPr>
+              <a:t> por Google Meet, incluidos la sesión 1 y los parciales (</a:t>
+            </a:r>
+            <a:r>
+              <a:rPr sz="1600" b="1" i="0">
+                <a:solidFill>
+                  <a:srgbClr val="333333"/>
+                </a:solidFill>
+                <a:latin typeface="Calibri"/>
+              </a:rPr>
               <a:t>5 / 9 / 13</a:t>
             </a:r>
             <a:r>
@@ -8196,7 +8232,7 @@
                 </a:solidFill>
                 <a:latin typeface="Calibri"/>
               </a:rPr>
-              <a:t>) </a:t>
+              <a:t>); festivos = </a:t>
             </a:r>
             <a:r>
               <a:rPr sz="1600" b="1" i="0">
@@ -8205,25 +8241,7 @@
                 </a:solidFill>
                 <a:latin typeface="Calibri"/>
               </a:rPr>
-              <a:t>presencial</a:t>
-            </a:r>
-            <a:r>
-              <a:rPr sz="1600" b="0" i="0">
-                <a:solidFill>
-                  <a:srgbClr val="333333"/>
-                </a:solidFill>
-                <a:latin typeface="Calibri"/>
-              </a:rPr>
-              <a:t>; resto </a:t>
-            </a:r>
-            <a:r>
-              <a:rPr sz="1600" b="1" i="0">
-                <a:solidFill>
-                  <a:srgbClr val="333333"/>
-                </a:solidFill>
-                <a:latin typeface="Calibri"/>
-              </a:rPr>
-              <a:t>virtual síncrona</a:t>
+              <a:t>clase autónoma</a:t>
             </a:r>
             <a:r>
               <a:rPr sz="1600" b="0" i="0">
@@ -9357,7 +9375,7 @@
                 </a:solidFill>
                 <a:latin typeface="Calibri"/>
               </a:rPr>
-              <a:t>Parciales presencial síncrono · nunca en festivo/autónoma. Día de parcial = solo evaluación.</a:t>
+              <a:t>Parciales síncronos por Meet · nunca en festivo/autónoma. Día de parcial = solo evaluación.</a:t>
             </a:r>
           </a:p>
         </p:txBody>
@@ -9816,7 +9834,7 @@
                 </a:solidFill>
                 <a:latin typeface="Calibri"/>
               </a:rPr>
-              <a:t> Parcial 1 (24/09) · presencial · solo evaluación</a:t>
+              <a:t> Parcial 1 (24/09) · virtual síncrona · solo evaluación</a:t>
             </a:r>
           </a:p>
           <a:p>
@@ -9975,7 +9993,7 @@
                 </a:solidFill>
                 <a:latin typeface="Calibri"/>
               </a:rPr>
-              <a:t> Parcial 2 (22/10) · presencial · solo evaluación</a:t>
+              <a:t> Parcial 2 (22/10) · virtual síncrona · solo evaluación</a:t>
             </a:r>
           </a:p>
           <a:p>
@@ -10111,7 +10129,7 @@
                 </a:solidFill>
                 <a:latin typeface="Calibri"/>
               </a:rPr>
-              <a:t> Parcial 3 (19/11) · presencial · solo evaluación</a:t>
+              <a:t> Parcial 3 (19/11) · virtual síncrona · solo evaluación</a:t>
             </a:r>
           </a:p>
         </p:txBody>

--- a/Seminario de Sistemas/Clases/Presentacion del Curso - Seminario de Sistemas.pptx
+++ b/Seminario de Sistemas/Clases/Presentacion del Curso - Seminario de Sistemas.pptx
@@ -3711,7 +3711,7 @@
               </a:spcAft>
             </a:pPr>
             <a:r>
-              <a:rPr sz="1600" b="0" i="0">
+              <a:rPr sz="2000" b="0" i="0">
                 <a:solidFill>
                   <a:srgbClr val="333333"/>
                 </a:solidFill>
@@ -3720,7 +3720,7 @@
               <a:t>–   </a:t>
             </a:r>
             <a:r>
-              <a:rPr sz="1600" b="1" i="0">
+              <a:rPr sz="2000" b="1" i="0">
                 <a:solidFill>
                   <a:srgbClr val="333333"/>
                 </a:solidFill>
@@ -3729,7 +3729,7 @@
               <a:t>Socialización de hoy (Sesión 0):</a:t>
             </a:r>
             <a:r>
-              <a:rPr sz="1600" b="0" i="0">
+              <a:rPr sz="2000" b="0" i="0">
                 <a:solidFill>
                   <a:srgbClr val="333333"/>
                 </a:solidFill>
@@ -3745,7 +3745,7 @@
               </a:spcAft>
             </a:pPr>
             <a:r>
-              <a:rPr sz="1600" b="0" i="0">
+              <a:rPr sz="2000" b="0" i="0">
                 <a:solidFill>
                   <a:srgbClr val="333333"/>
                 </a:solidFill>
@@ -3754,7 +3754,7 @@
               <a:t>–   Diseño, desarrollo y </a:t>
             </a:r>
             <a:r>
-              <a:rPr sz="1600" b="1" i="0">
+              <a:rPr sz="2000" b="1" i="0">
                 <a:solidFill>
                   <a:srgbClr val="333333"/>
                 </a:solidFill>
@@ -3763,7 +3763,7 @@
               <a:t>sustentación</a:t>
             </a:r>
             <a:r>
-              <a:rPr sz="1600" b="0" i="0">
+              <a:rPr sz="2000" b="0" i="0">
                 <a:solidFill>
                   <a:srgbClr val="333333"/>
                 </a:solidFill>
@@ -3779,7 +3779,7 @@
               </a:spcAft>
             </a:pPr>
             <a:r>
-              <a:rPr sz="1600" b="0" i="0">
+              <a:rPr sz="2000" b="0" i="0">
                 <a:solidFill>
                   <a:srgbClr val="333333"/>
                 </a:solidFill>
@@ -3795,7 +3795,7 @@
               </a:spcAft>
             </a:pPr>
             <a:r>
-              <a:rPr sz="1600" b="0" i="0">
+              <a:rPr sz="2000" b="0" i="0">
                 <a:solidFill>
                   <a:srgbClr val="333333"/>
                 </a:solidFill>
@@ -3804,7 +3804,7 @@
               <a:t>–   Pesa </a:t>
             </a:r>
             <a:r>
-              <a:rPr sz="1600" b="1" i="0">
+              <a:rPr sz="2000" b="1" i="0">
                 <a:solidFill>
                   <a:srgbClr val="333333"/>
                 </a:solidFill>
@@ -3813,7 +3813,7 @@
               <a:t>20%</a:t>
             </a:r>
             <a:r>
-              <a:rPr sz="1600" b="0" i="0">
+              <a:rPr sz="2000" b="0" i="0">
                 <a:solidFill>
                   <a:srgbClr val="333333"/>
                 </a:solidFill>
@@ -4033,7 +4033,7 @@
               </a:spcAft>
             </a:pPr>
             <a:r>
-              <a:rPr sz="1600" b="0" i="0">
+              <a:rPr sz="2000" b="0" i="0">
                 <a:solidFill>
                   <a:srgbClr val="333333"/>
                 </a:solidFill>
@@ -4049,7 +4049,7 @@
               </a:spcAft>
             </a:pPr>
             <a:r>
-              <a:rPr sz="1600" b="0" i="0">
+              <a:rPr sz="2000" b="0" i="0">
                 <a:solidFill>
                   <a:srgbClr val="333333"/>
                 </a:solidFill>
@@ -4058,7 +4058,7 @@
               <a:t>–   </a:t>
             </a:r>
             <a:r>
-              <a:rPr sz="1600" b="1" i="0">
+              <a:rPr sz="2000" b="1" i="0">
                 <a:solidFill>
                   <a:srgbClr val="333333"/>
                 </a:solidFill>
@@ -4067,7 +4067,7 @@
               <a:t>ExamLab</a:t>
             </a:r>
             <a:r>
-              <a:rPr sz="1600" b="0" i="0">
+              <a:rPr sz="2000" b="0" i="0">
                 <a:solidFill>
                   <a:srgbClr val="333333"/>
                 </a:solidFill>
@@ -4083,7 +4083,7 @@
               </a:spcAft>
             </a:pPr>
             <a:r>
-              <a:rPr sz="1600" b="0" i="0">
+              <a:rPr sz="2000" b="0" i="0">
                 <a:solidFill>
                   <a:srgbClr val="333333"/>
                 </a:solidFill>
@@ -7116,7 +7116,7 @@
               </a:spcAft>
             </a:pPr>
             <a:r>
-              <a:rPr sz="1600" b="0" i="0">
+              <a:rPr sz="2000" b="0" i="0">
                 <a:solidFill>
                   <a:srgbClr val="333333"/>
                 </a:solidFill>
@@ -7125,7 +7125,7 @@
               <a:t>–   Consolidar conocimientos de Programacion II mediante </a:t>
             </a:r>
             <a:r>
-              <a:rPr sz="1600" b="1" i="0">
+              <a:rPr sz="2000" b="1" i="0">
                 <a:solidFill>
                   <a:srgbClr val="333333"/>
                 </a:solidFill>
@@ -7134,7 +7134,7 @@
               <a:t>análisis, diseño, desarrollo y exposición</a:t>
             </a:r>
             <a:r>
-              <a:rPr sz="1600" b="0" i="0">
+              <a:rPr sz="2000" b="0" i="0">
                 <a:solidFill>
                   <a:srgbClr val="333333"/>
                 </a:solidFill>
@@ -7150,7 +7150,7 @@
               </a:spcAft>
             </a:pPr>
             <a:r>
-              <a:rPr sz="1600" b="0" i="0">
+              <a:rPr sz="2000" b="0" i="0">
                 <a:solidFill>
                   <a:srgbClr val="333333"/>
                 </a:solidFill>
@@ -7166,7 +7166,7 @@
               </a:spcAft>
             </a:pPr>
             <a:r>
-              <a:rPr sz="1600" b="0" i="0">
+              <a:rPr sz="2000" b="0" i="0">
                 <a:solidFill>
                   <a:srgbClr val="333333"/>
                 </a:solidFill>
@@ -7175,7 +7175,7 @@
               <a:t>–   </a:t>
             </a:r>
             <a:r>
-              <a:rPr sz="1600" b="1" i="0">
+              <a:rPr sz="2000" b="1" i="0">
                 <a:solidFill>
                   <a:srgbClr val="333333"/>
                 </a:solidFill>
@@ -7184,7 +7184,7 @@
               <a:t>Objeto de estudio:</a:t>
             </a:r>
             <a:r>
-              <a:rPr sz="1600" b="0" i="0">
+              <a:rPr sz="2000" b="0" i="0">
                 <a:solidFill>
                   <a:srgbClr val="333333"/>
                 </a:solidFill>
@@ -7404,7 +7404,7 @@
               </a:spcAft>
             </a:pPr>
             <a:r>
-              <a:rPr sz="1500" b="0" i="0">
+              <a:rPr sz="2000" b="0" i="0">
                 <a:solidFill>
                   <a:srgbClr val="333333"/>
                 </a:solidFill>
@@ -7413,7 +7413,7 @@
               <a:t>–   </a:t>
             </a:r>
             <a:r>
-              <a:rPr sz="1500" b="1" i="0">
+              <a:rPr sz="2000" b="1" i="0">
                 <a:solidFill>
                   <a:srgbClr val="333333"/>
                 </a:solidFill>
@@ -7422,7 +7422,7 @@
               <a:t>Objeto de estudio:</a:t>
             </a:r>
             <a:r>
-              <a:rPr sz="1500" b="0" i="0">
+              <a:rPr sz="2000" b="0" i="0">
                 <a:solidFill>
                   <a:srgbClr val="333333"/>
                 </a:solidFill>
@@ -7438,7 +7438,7 @@
               </a:spcAft>
             </a:pPr>
             <a:r>
-              <a:rPr sz="1500" b="0" i="0">
+              <a:rPr sz="2000" b="0" i="0">
                 <a:solidFill>
                   <a:srgbClr val="333333"/>
                 </a:solidFill>
@@ -7447,7 +7447,7 @@
               <a:t>–   </a:t>
             </a:r>
             <a:r>
-              <a:rPr sz="1500" b="1" i="0">
+              <a:rPr sz="2000" b="1" i="0">
                 <a:solidFill>
                   <a:srgbClr val="333333"/>
                 </a:solidFill>
@@ -7456,7 +7456,7 @@
               <a:t>Objetivo:</a:t>
             </a:r>
             <a:r>
-              <a:rPr sz="1500" b="0" i="0">
+              <a:rPr sz="2000" b="0" i="0">
                 <a:solidFill>
                   <a:srgbClr val="333333"/>
                 </a:solidFill>
@@ -7465,7 +7465,7 @@
               <a:t> desarrollar un proyecto de software aplicando técnicas avanzadas de </a:t>
             </a:r>
             <a:r>
-              <a:rPr sz="1500" b="1" i="0">
+              <a:rPr sz="2000" b="1" i="0">
                 <a:solidFill>
                   <a:srgbClr val="333333"/>
                 </a:solidFill>
@@ -7474,7 +7474,7 @@
               <a:t>POO</a:t>
             </a:r>
             <a:r>
-              <a:rPr sz="1500" b="0" i="0">
+              <a:rPr sz="2000" b="0" i="0">
                 <a:solidFill>
                   <a:srgbClr val="333333"/>
                 </a:solidFill>
@@ -7490,7 +7490,7 @@
               </a:spcAft>
             </a:pPr>
             <a:r>
-              <a:rPr sz="1500" b="0" i="0">
+              <a:rPr sz="2000" b="0" i="0">
                 <a:solidFill>
                   <a:srgbClr val="333333"/>
                 </a:solidFill>
@@ -7506,7 +7506,7 @@
               </a:spcAft>
             </a:pPr>
             <a:r>
-              <a:rPr sz="1500" b="0" i="0">
+              <a:rPr sz="2000" b="0" i="0">
                 <a:solidFill>
                   <a:srgbClr val="333333"/>
                 </a:solidFill>
@@ -7726,7 +7726,7 @@
               </a:spcAft>
             </a:pPr>
             <a:r>
-              <a:rPr sz="1500" b="0" i="0">
+              <a:rPr sz="2000" b="0" i="0">
                 <a:solidFill>
                   <a:srgbClr val="333333"/>
                 </a:solidFill>
@@ -7735,7 +7735,7 @@
               <a:t>–   </a:t>
             </a:r>
             <a:r>
-              <a:rPr sz="1500" b="1" i="0">
+              <a:rPr sz="2000" b="1" i="0">
                 <a:solidFill>
                   <a:srgbClr val="333333"/>
                 </a:solidFill>
@@ -7744,7 +7744,7 @@
               <a:t>RAA1</a:t>
             </a:r>
             <a:r>
-              <a:rPr sz="1500" b="0" i="0">
+              <a:rPr sz="2000" b="0" i="0">
                 <a:solidFill>
                   <a:srgbClr val="333333"/>
                 </a:solidFill>
@@ -7760,7 +7760,7 @@
               </a:spcAft>
             </a:pPr>
             <a:r>
-              <a:rPr sz="1500" b="0" i="0">
+              <a:rPr sz="2000" b="0" i="0">
                 <a:solidFill>
                   <a:srgbClr val="333333"/>
                 </a:solidFill>
@@ -7769,7 +7769,7 @@
               <a:t>–   </a:t>
             </a:r>
             <a:r>
-              <a:rPr sz="1500" b="1" i="0">
+              <a:rPr sz="2000" b="1" i="0">
                 <a:solidFill>
                   <a:srgbClr val="333333"/>
                 </a:solidFill>
@@ -7778,7 +7778,7 @@
               <a:t>RAA2</a:t>
             </a:r>
             <a:r>
-              <a:rPr sz="1500" b="0" i="0">
+              <a:rPr sz="2000" b="0" i="0">
                 <a:solidFill>
                   <a:srgbClr val="333333"/>
                 </a:solidFill>
@@ -7794,7 +7794,7 @@
               </a:spcAft>
             </a:pPr>
             <a:r>
-              <a:rPr sz="1500" b="0" i="0">
+              <a:rPr sz="2000" b="0" i="0">
                 <a:solidFill>
                   <a:srgbClr val="333333"/>
                 </a:solidFill>
@@ -7803,7 +7803,7 @@
               <a:t>–   </a:t>
             </a:r>
             <a:r>
-              <a:rPr sz="1500" b="1" i="0">
+              <a:rPr sz="2000" b="1" i="0">
                 <a:solidFill>
                   <a:srgbClr val="333333"/>
                 </a:solidFill>
@@ -7812,7 +7812,7 @@
               <a:t>RAA3</a:t>
             </a:r>
             <a:r>
-              <a:rPr sz="1500" b="0" i="0">
+              <a:rPr sz="2000" b="0" i="0">
                 <a:solidFill>
                   <a:srgbClr val="333333"/>
                 </a:solidFill>
@@ -8032,7 +8032,7 @@
               </a:spcAft>
             </a:pPr>
             <a:r>
-              <a:rPr sz="1600" b="0" i="0">
+              <a:rPr sz="2000" b="0" i="0">
                 <a:solidFill>
                   <a:srgbClr val="333333"/>
                 </a:solidFill>
@@ -8041,7 +8041,7 @@
               <a:t>–   </a:t>
             </a:r>
             <a:r>
-              <a:rPr sz="1600" b="1" i="0">
+              <a:rPr sz="2000" b="1" i="0">
                 <a:solidFill>
                   <a:srgbClr val="333333"/>
                 </a:solidFill>
@@ -8050,7 +8050,7 @@
               <a:t>Sesión 0 (hoy)</a:t>
             </a:r>
             <a:r>
-              <a:rPr sz="1600" b="0" i="0">
+              <a:rPr sz="2000" b="0" i="0">
                 <a:solidFill>
                   <a:srgbClr val="333333"/>
                 </a:solidFill>
@@ -8059,7 +8059,7 @@
               <a:t> = logística + acuerdo pedagógico + evaluación + CONTENIDO + </a:t>
             </a:r>
             <a:r>
-              <a:rPr sz="1600" b="1" i="0">
+              <a:rPr sz="2000" b="1" i="0">
                 <a:solidFill>
                   <a:srgbClr val="333333"/>
                 </a:solidFill>
@@ -8068,7 +8068,7 @@
               <a:t>socialización del Proyecto Integrador</a:t>
             </a:r>
             <a:r>
-              <a:rPr sz="1600" b="0" i="0">
+              <a:rPr sz="2000" b="0" i="0">
                 <a:solidFill>
                   <a:srgbClr val="333333"/>
                 </a:solidFill>
@@ -8084,7 +8084,7 @@
               </a:spcAft>
             </a:pPr>
             <a:r>
-              <a:rPr sz="1600" b="0" i="0">
+              <a:rPr sz="2000" b="0" i="0">
                 <a:solidFill>
                   <a:srgbClr val="333333"/>
                 </a:solidFill>
@@ -8093,7 +8093,7 @@
               <a:t>–   </a:t>
             </a:r>
             <a:r>
-              <a:rPr sz="1600" b="1" i="0">
+              <a:rPr sz="2000" b="1" i="0">
                 <a:solidFill>
                   <a:srgbClr val="333333"/>
                 </a:solidFill>
@@ -8102,7 +8102,7 @@
               <a:t>Sesión 1</a:t>
             </a:r>
             <a:r>
-              <a:rPr sz="1600" b="0" i="0">
+              <a:rPr sz="2000" b="0" i="0">
                 <a:solidFill>
                   <a:srgbClr val="333333"/>
                 </a:solidFill>
@@ -8118,7 +8118,7 @@
               </a:spcAft>
             </a:pPr>
             <a:r>
-              <a:rPr sz="1600" b="0" i="0">
+              <a:rPr sz="2000" b="0" i="0">
                 <a:solidFill>
                   <a:srgbClr val="333333"/>
                 </a:solidFill>
@@ -8127,7 +8127,7 @@
               <a:t>–   Cada jueves (120 min): </a:t>
             </a:r>
             <a:r>
-              <a:rPr sz="1600" b="1" i="0">
+              <a:rPr sz="2000" b="1" i="0">
                 <a:solidFill>
                   <a:srgbClr val="333333"/>
                 </a:solidFill>
@@ -8136,7 +8136,7 @@
               <a:t>Teoría Core</a:t>
             </a:r>
             <a:r>
-              <a:rPr sz="1600" b="0" i="0">
+              <a:rPr sz="2000" b="0" i="0">
                 <a:solidFill>
                   <a:srgbClr val="333333"/>
                 </a:solidFill>
@@ -8145,7 +8145,7 @@
               <a:t> → </a:t>
             </a:r>
             <a:r>
-              <a:rPr sz="1600" b="1" i="0">
+              <a:rPr sz="2000" b="1" i="0">
                 <a:solidFill>
                   <a:srgbClr val="333333"/>
                 </a:solidFill>
@@ -8154,7 +8154,7 @@
               <a:t>Taller / exposición</a:t>
             </a:r>
             <a:r>
-              <a:rPr sz="1600" b="0" i="0">
+              <a:rPr sz="2000" b="0" i="0">
                 <a:solidFill>
                   <a:srgbClr val="333333"/>
                 </a:solidFill>
@@ -8163,7 +8163,7 @@
               <a:t> → cierre. Modalidad </a:t>
             </a:r>
             <a:r>
-              <a:rPr sz="1600" b="1" i="0">
+              <a:rPr sz="2000" b="1" i="0">
                 <a:solidFill>
                   <a:srgbClr val="333333"/>
                 </a:solidFill>
@@ -8172,7 +8172,7 @@
               <a:t>Virtual</a:t>
             </a:r>
             <a:r>
-              <a:rPr sz="1600" b="0" i="0">
+              <a:rPr sz="2000" b="0" i="0">
                 <a:solidFill>
                   <a:srgbClr val="333333"/>
                 </a:solidFill>
@@ -8181,7 +8181,7 @@
               <a:t>: las </a:t>
             </a:r>
             <a:r>
-              <a:rPr sz="1600" b="1" i="0">
+              <a:rPr sz="2000" b="1" i="0">
                 <a:solidFill>
                   <a:srgbClr val="333333"/>
                 </a:solidFill>
@@ -8190,7 +8190,7 @@
               <a:t>13 sesiones</a:t>
             </a:r>
             <a:r>
-              <a:rPr sz="1600" b="0" i="0">
+              <a:rPr sz="2000" b="0" i="0">
                 <a:solidFill>
                   <a:srgbClr val="333333"/>
                 </a:solidFill>
@@ -8199,7 +8199,7 @@
               <a:t> son </a:t>
             </a:r>
             <a:r>
-              <a:rPr sz="1600" b="1" i="0">
+              <a:rPr sz="2000" b="1" i="0">
                 <a:solidFill>
                   <a:srgbClr val="333333"/>
                 </a:solidFill>
@@ -8208,7 +8208,7 @@
               <a:t>virtual síncrona</a:t>
             </a:r>
             <a:r>
-              <a:rPr sz="1600" b="0" i="0">
+              <a:rPr sz="2000" b="0" i="0">
                 <a:solidFill>
                   <a:srgbClr val="333333"/>
                 </a:solidFill>
@@ -8217,7 +8217,7 @@
               <a:t> por Google Meet, incluidos la sesión 1 y los parciales (</a:t>
             </a:r>
             <a:r>
-              <a:rPr sz="1600" b="1" i="0">
+              <a:rPr sz="2000" b="1" i="0">
                 <a:solidFill>
                   <a:srgbClr val="333333"/>
                 </a:solidFill>
@@ -8226,7 +8226,7 @@
               <a:t>5 / 9 / 13</a:t>
             </a:r>
             <a:r>
-              <a:rPr sz="1600" b="0" i="0">
+              <a:rPr sz="2000" b="0" i="0">
                 <a:solidFill>
                   <a:srgbClr val="333333"/>
                 </a:solidFill>
@@ -8235,7 +8235,7 @@
               <a:t>); festivos = </a:t>
             </a:r>
             <a:r>
-              <a:rPr sz="1600" b="1" i="0">
+              <a:rPr sz="2000" b="1" i="0">
                 <a:solidFill>
                   <a:srgbClr val="333333"/>
                 </a:solidFill>
@@ -8244,7 +8244,7 @@
               <a:t>clase autónoma</a:t>
             </a:r>
             <a:r>
-              <a:rPr sz="1600" b="0" i="0">
+              <a:rPr sz="2000" b="0" i="0">
                 <a:solidFill>
                   <a:srgbClr val="333333"/>
                 </a:solidFill>
@@ -8253,7 +8253,7 @@
               <a:t>; dos sesiones son </a:t>
             </a:r>
             <a:r>
-              <a:rPr sz="1600" b="1" i="0">
+              <a:rPr sz="2000" b="1" i="0">
                 <a:solidFill>
                   <a:srgbClr val="333333"/>
                 </a:solidFill>
@@ -8262,7 +8262,7 @@
               <a:t>dobles</a:t>
             </a:r>
             <a:r>
-              <a:rPr sz="1600" b="0" i="0">
+              <a:rPr sz="2000" b="0" i="0">
                 <a:solidFill>
                   <a:srgbClr val="333333"/>
                 </a:solidFill>
@@ -8278,7 +8278,7 @@
               </a:spcAft>
             </a:pPr>
             <a:r>
-              <a:rPr sz="1600" b="0" i="0">
+              <a:rPr sz="2000" b="0" i="0">
                 <a:solidFill>
                   <a:srgbClr val="333333"/>
                 </a:solidFill>
@@ -8287,7 +8287,7 @@
               <a:t>–   Hilo conductor de todo el semestre: </a:t>
             </a:r>
             <a:r>
-              <a:rPr sz="1600" b="1" i="0">
+              <a:rPr sz="2000" b="1" i="0">
                 <a:solidFill>
                   <a:srgbClr val="333333"/>
                 </a:solidFill>
@@ -8296,7 +8296,7 @@
               <a:t>Proyecto Integrador</a:t>
             </a:r>
             <a:r>
-              <a:rPr sz="1600" b="0" i="0">
+              <a:rPr sz="2000" b="0" i="0">
                 <a:solidFill>
                   <a:srgbClr val="333333"/>
                 </a:solidFill>
